--- a/docs/ServiceHub-API-Checkpoint.pptx
+++ b/docs/ServiceHub-API-Checkpoint.pptx
@@ -1958,7 +1958,7 @@
                 <a:ea typeface="Calibri" pitchFamily="34" charset="-122"/>
                 <a:cs typeface="Calibri" pitchFamily="34" charset="-120"/>
               </a:rPr>
-              <a:t>Integrantes: [preencher com os nomes da equipe]</a:t>
+              <a:t>Integrante: Esther Carolina Batista Lima</a:t>
             </a:r>
             <a:endParaRPr lang="en-US" sz="1300" dirty="0"/>
           </a:p>
@@ -2629,7 +2629,7 @@
                 <a:ea typeface="Calibri" pitchFamily="34" charset="-122"/>
                 <a:cs typeface="Calibri" pitchFamily="34" charset="-120"/>
               </a:rPr>
-              <a:t>Projeto Spring Boot configurado com PostgreSQL</a:t>
+              <a:t>Projeto Spring Boot configurado com PostgreSQL (Docker Compose)</a:t>
             </a:r>
             <a:endParaRPr lang="en-US" sz="1300" dirty="0"/>
           </a:p>
@@ -2713,7 +2713,7 @@
                 <a:ea typeface="Calibri" pitchFamily="34" charset="-122"/>
                 <a:cs typeface="Calibri" pitchFamily="34" charset="-120"/>
               </a:rPr>
-              <a:t>27 testes automatizados passando</a:t>
+              <a:t>41 testes automatizados passando</a:t>
             </a:r>
             <a:endParaRPr lang="en-US" sz="1300" dirty="0"/>
           </a:p>
@@ -3087,7 +3087,7 @@
         <p:spPr>
           <a:xfrm>
             <a:off x="548640" y="3291840"/>
-            <a:ext cx="4572000" cy="640080"/>
+            <a:ext cx="4572000" cy="822960"/>
           </a:xfrm>
           <a:prstGeom prst="rect">
             <a:avLst/>
@@ -3135,6 +3135,26 @@
                 <a:cs typeface="Calibri" pitchFamily="34" charset="-120"/>
               </a:rPr>
               <a:t>README.md: execução, endpoints e testes</a:t>
+            </a:r>
+            <a:endParaRPr lang="en-US" sz="1300" dirty="0"/>
+          </a:p>
+          <a:p>
+            <a:pPr indent="0" marL="0">
+              <a:spcAft>
+                <a:spcPts val="200"/>
+              </a:spcAft>
+              <a:buNone/>
+            </a:pPr>
+            <a:r>
+              <a:rPr lang="en-US" sz="1300" dirty="0">
+                <a:solidFill>
+                  <a:srgbClr val="9FB4C0"/>
+                </a:solidFill>
+                <a:latin typeface="Calibri" pitchFamily="34" charset="0"/>
+                <a:ea typeface="Calibri" pitchFamily="34" charset="-122"/>
+                <a:cs typeface="Calibri" pitchFamily="34" charset="-120"/>
+              </a:rPr>
+              <a:t>RELATORIO_TECNICO_TESTES.md: validação detalhada</a:t>
             </a:r>
             <a:endParaRPr lang="en-US" sz="1300" dirty="0"/>
           </a:p>
@@ -5703,7 +5723,7 @@
                 <a:ea typeface="Calibri" pitchFamily="34" charset="-122"/>
                 <a:cs typeface="Calibri" pitchFamily="34" charset="-120"/>
               </a:rPr>
-              <a:t>Bean Validation · JUnit 5 · MockMvc · Mockito · H2 (apenas nos testes)</a:t>
+              <a:t>Bean Validation · JUnit 5 · MockMvc · Mockito · H2 (apenas nos testes) · Docker Compose</a:t>
             </a:r>
             <a:endParaRPr lang="en-US" sz="1300" dirty="0"/>
           </a:p>
@@ -15882,6 +15902,26 @@
             </a:r>
             <a:endParaRPr lang="en-US" sz="1050" dirty="0"/>
           </a:p>
+          <a:p>
+            <a:pPr indent="0" marL="0">
+              <a:spcAft>
+                <a:spcPts val="100"/>
+              </a:spcAft>
+              <a:buNone/>
+            </a:pPr>
+            <a:r>
+              <a:rPr lang="en-US" sz="1050" dirty="0">
+                <a:solidFill>
+                  <a:srgbClr val="9FB4C0"/>
+                </a:solidFill>
+                <a:latin typeface="Courier New" pitchFamily="34" charset="0"/>
+                <a:ea typeface="Courier New" pitchFamily="34" charset="-122"/>
+                <a:cs typeface="Courier New" pitchFamily="34" charset="-120"/>
+              </a:rPr>
+              <a:t>// nome e categoria: strip() antes da validação</a:t>
+            </a:r>
+            <a:endParaRPr lang="en-US" sz="1050" dirty="0"/>
+          </a:p>
         </p:txBody>
       </p:sp>
       <p:sp>
@@ -15951,7 +15991,7 @@
                 <a:ea typeface="Calibri" pitchFamily="34" charset="-122"/>
                 <a:cs typeface="Calibri" pitchFamily="34" charset="-120"/>
               </a:rPr>
-              <a:t>27</a:t>
+              <a:t>41</a:t>
             </a:r>
             <a:endParaRPr lang="en-US" sz="5400" dirty="0"/>
           </a:p>
@@ -16033,7 +16073,7 @@
                 <a:ea typeface="Calibri" pitchFamily="34" charset="-122"/>
                 <a:cs typeface="Calibri" pitchFamily="34" charset="-120"/>
               </a:rPr>
-              <a:t>23 de integração (MockMvc + H2) e 4 unitários (Mockito)</a:t>
+              <a:t>31 de integração (MockMvc + H2) e 10 unitários</a:t>
             </a:r>
             <a:endParaRPr lang="en-US" sz="1300" dirty="0"/>
           </a:p>
@@ -16109,7 +16149,7 @@
                 <a:ea typeface="Calibri" pitchFamily="34" charset="-122"/>
                 <a:cs typeface="Calibri" pitchFamily="34" charset="-120"/>
               </a:rPr>
-              <a:t>Validado manualmente no PostgreSQL 16.4</a:t>
+              <a:t>Validado manualmente no PostgreSQL 16.15</a:t>
             </a:r>
             <a:endParaRPr lang="en-US" sz="1200" dirty="0"/>
           </a:p>
@@ -16129,7 +16169,7 @@
                 <a:ea typeface="Calibri" pitchFamily="34" charset="-122"/>
                 <a:cs typeface="Calibri" pitchFamily="34" charset="-120"/>
               </a:rPr>
-              <a:t>CRUD por HTTP · SELECT direto na tabela · dados mantidos após reiniciar a aplicação</a:t>
+              <a:t>Em Docker: CRUD por HTTP · SELECT direto na tabela · migration Flyway V1 aplicada</a:t>
             </a:r>
             <a:endParaRPr lang="en-US" sz="1200" dirty="0"/>
           </a:p>
